--- a/AI_Agents_and_Advanced_Fine_Tuning_Bootcamp/Slides/Week_11_agentic_rag_and_agentic_training.pptx
+++ b/AI_Agents_and_Advanced_Fine_Tuning_Bootcamp/Slides/Week_11_agentic_rag_and_agentic_training.pptx
@@ -3325,7 +3325,7 @@
                 </a:solidFill>
                 <a:latin typeface="Calibri"/>
               </a:rPr>
-              <a:t>Sunday, August 16, 2026</a:t>
+              <a:t>Sunday, December 13, 2026</a:t>
             </a:r>
           </a:p>
         </p:txBody>
